--- a/生成的课件/第7章  定价实践.pptx
+++ b/生成的课件/第7章  定价实践.pptx
@@ -4067,7 +4067,7 @@
                 <a:latin typeface="Times New Roman"/>
                 <a:ea typeface="宋体"/>
               </a:rPr>
-              <a:t>  1. 招投标博弈与期望利润模型</a:t>
+              <a:t>1. 招投标博弈与期望利润模型</a:t>
             </a:r>
           </a:p>
         </p:txBody>
@@ -4110,7 +4110,7 @@
                 <a:latin typeface="Times New Roman"/>
                 <a:ea typeface="宋体"/>
               </a:rPr>
-              <a:t>（1）投标报价的双向权衡： </a:t>
+              <a:t>（1）投标报价的双向权衡：</a:t>
             </a:r>
             <a:r>
               <a:rPr sz="1250" b="0">
@@ -4140,7 +4140,7 @@
                 <a:latin typeface="Times New Roman"/>
                 <a:ea typeface="宋体"/>
               </a:rPr>
-              <a:t>（2）目标函数（期望利润最大化）： </a:t>
+              <a:t>（2）目标函数（期望利润最大化）：</a:t>
             </a:r>
             <a:r>
               <a:rPr sz="1250" b="0">
@@ -4150,7 +4150,7 @@
                 <a:latin typeface="Times New Roman"/>
                 <a:ea typeface="宋体"/>
               </a:rPr>
-              <a:t>\max_P E(\pi) = (P - C) \cdot P(\text{中标}|P) \quad (C: 项目预计增量成本)</a:t>
+              <a:t>max_P E(π) = (P - C) · P(中标|P) (C: 项目预计增量成本)</a:t>
             </a:r>
           </a:p>
         </p:txBody>
@@ -4250,7 +4250,7 @@
                 <a:latin typeface="Times New Roman"/>
                 <a:ea typeface="宋体"/>
               </a:rPr>
-              <a:t>  2. 例7-5：某工程最优报价测算全景表</a:t>
+              <a:t>2. 例7-5：某工程最优报价测算全景表</a:t>
             </a:r>
           </a:p>
         </p:txBody>
@@ -4293,7 +4293,7 @@
                 <a:latin typeface="Times New Roman"/>
                 <a:ea typeface="宋体"/>
               </a:rPr>
-              <a:t>   • 报价 140 万元： </a:t>
+              <a:t>• 报价 140 万元：</a:t>
             </a:r>
             <a:r>
               <a:rPr sz="1150" b="0">
@@ -4303,7 +4303,7 @@
                 <a:latin typeface="Times New Roman"/>
                 <a:ea typeface="宋体"/>
               </a:rPr>
-              <a:t>利润 40 万，中标概率 0.20 \implies 期望利润 E(\pi) = 40 \times 0.20 = 8.0 万元</a:t>
+              <a:t>利润 40 万，中标概率 0.20 ⇒ 期望利润 E(π) = 40 × 0.20 = 8.0 万元</a:t>
             </a:r>
           </a:p>
           <a:p>
@@ -4343,7 +4343,7 @@
                 <a:latin typeface="Times New Roman"/>
                 <a:ea typeface="宋体"/>
               </a:rPr>
-              <a:t>   • 报价 130 万元： </a:t>
+              <a:t>• 报价 130 万元：</a:t>
             </a:r>
             <a:r>
               <a:rPr sz="1150" b="0">
@@ -4353,7 +4353,7 @@
                 <a:latin typeface="Times New Roman"/>
                 <a:ea typeface="宋体"/>
               </a:rPr>
-              <a:t>利润 30 万，中标概率 0.50 \implies 期望利润 E(\pi) = 30 \times 0.50 = 15.0 万元</a:t>
+              <a:t>利润 30 万，中标概率 0.50 ⇒ 期望利润 E(π) = 30 × 0.50 = 15.0 万元</a:t>
             </a:r>
           </a:p>
           <a:p>
@@ -4373,7 +4373,7 @@
                 <a:latin typeface="Times New Roman"/>
                 <a:ea typeface="宋体"/>
               </a:rPr>
-              <a:t>   • 报价 120 万元： </a:t>
+              <a:t>• 报价 120 万元：</a:t>
             </a:r>
             <a:r>
               <a:rPr sz="1150" b="0">
@@ -4383,7 +4383,7 @@
                 <a:latin typeface="Times New Roman"/>
                 <a:ea typeface="宋体"/>
               </a:rPr>
-              <a:t>利润 20 万，中标概率 0.80 \implies 期望利润 E(\pi) = 20 \times 0.80 = 16.0 万元 ★ (最优！)</a:t>
+              <a:t>利润 20 万，中标概率 0.80 ⇒ 期望利润 E(π) = 20 × 0.80 = 16.0 万元 ★ (最优！)</a:t>
             </a:r>
           </a:p>
           <a:p>
@@ -4403,7 +4403,7 @@
                 <a:latin typeface="Times New Roman"/>
                 <a:ea typeface="宋体"/>
               </a:rPr>
-              <a:t>   • 报价 110 万元： </a:t>
+              <a:t>• 报价 110 万元：</a:t>
             </a:r>
             <a:r>
               <a:rPr sz="1150" b="0">
@@ -4413,7 +4413,7 @@
                 <a:latin typeface="Times New Roman"/>
                 <a:ea typeface="宋体"/>
               </a:rPr>
-              <a:t>利润 10 万，中标概率 0.95 \implies 期望利润 E(\pi) = 10 \times 0.95 = 9.5 万元</a:t>
+              <a:t>利润 10 万，中标概率 0.95 ⇒ 期望利润 E(π) = 10 × 0.95 = 9.5 万元</a:t>
             </a:r>
           </a:p>
           <a:p>
@@ -4433,7 +4433,7 @@
                 <a:latin typeface="Times New Roman"/>
                 <a:ea typeface="宋体"/>
               </a:rPr>
-              <a:t>（2）决策结论： </a:t>
+              <a:t>（2）决策结论：</a:t>
             </a:r>
             <a:r>
               <a:rPr sz="1150" b="0">
@@ -4500,7 +4500,7 @@
                 <a:latin typeface="Times New Roman"/>
                 <a:ea typeface="宋体"/>
               </a:rPr>
-              <a:t>  ★ 核心要点：招投标模型将直觉博弈转化为严密的概率期望最优化计算，有效提升竞标胜率与收益。</a:t>
+              <a:t>★ 核心要点：招投标模型将直觉博弈转化为严密的概率期望最优化计算，有效提升竞标胜率与收益。</a:t>
             </a:r>
           </a:p>
         </p:txBody>
@@ -5214,7 +5214,7 @@
                 <a:latin typeface="Times New Roman"/>
                 <a:ea typeface="宋体"/>
               </a:rPr>
-              <a:t>  1. 实行差别定价的三大基本前提条件</a:t>
+              <a:t>1. 实行差别定价的三大基本前提条件</a:t>
             </a:r>
           </a:p>
         </p:txBody>
@@ -5257,7 +5257,7 @@
                 <a:latin typeface="Times New Roman"/>
                 <a:ea typeface="宋体"/>
               </a:rPr>
-              <a:t>（1）企业具有垄断力： </a:t>
+              <a:t>（1）企业具有垄断力：</a:t>
             </a:r>
             <a:r>
               <a:rPr sz="1250" b="0">
@@ -5287,7 +5287,7 @@
                 <a:latin typeface="Times New Roman"/>
                 <a:ea typeface="宋体"/>
               </a:rPr>
-              <a:t>（2）市场能有效分割： </a:t>
+              <a:t>（2）市场能有效分割：</a:t>
             </a:r>
             <a:r>
               <a:rPr sz="1250" b="0">
@@ -5317,7 +5317,7 @@
                 <a:latin typeface="Times New Roman"/>
                 <a:ea typeface="宋体"/>
               </a:rPr>
-              <a:t>（3）子市场需求弹性不同： </a:t>
+              <a:t>（3）子市场需求弹性不同：</a:t>
             </a:r>
             <a:r>
               <a:rPr sz="1250" b="0">
@@ -5427,7 +5427,7 @@
                 <a:latin typeface="Times New Roman"/>
                 <a:ea typeface="宋体"/>
               </a:rPr>
-              <a:t>  2. 一级与二级价格歧视形态</a:t>
+              <a:t>2. 一级与二级价格歧视形态</a:t>
             </a:r>
           </a:p>
         </p:txBody>
@@ -5470,7 +5470,7 @@
                 <a:latin typeface="Times New Roman"/>
                 <a:ea typeface="宋体"/>
               </a:rPr>
-              <a:t>（1）一级价格歧视（完全价格歧视）： </a:t>
+              <a:t>（1）一级价格歧视（完全价格歧视）：</a:t>
             </a:r>
             <a:r>
               <a:rPr sz="1250" b="0">
@@ -5500,7 +5500,7 @@
                 <a:latin typeface="Times New Roman"/>
                 <a:ea typeface="宋体"/>
               </a:rPr>
-              <a:t>（2）二级价格歧视（数量折扣）： </a:t>
+              <a:t>（2）二级价格歧视（数量折扣）：</a:t>
             </a:r>
             <a:r>
               <a:rPr sz="1250" b="0">
@@ -5567,7 +5567,7 @@
                 <a:latin typeface="Times New Roman"/>
                 <a:ea typeface="宋体"/>
               </a:rPr>
-              <a:t>  ★ 核心要点：差别定价的本质是企业通过产品差异化和细分市场设计，精巧提取消费者的保留价格剩余。</a:t>
+              <a:t>★ 核心要点：差别定价的本质是企业通过产品差异化和细分市场设计，精巧提取消费者的保留价格剩余。</a:t>
             </a:r>
           </a:p>
         </p:txBody>
@@ -5974,7 +5974,7 @@
                 <a:latin typeface="Times New Roman"/>
                 <a:ea typeface="宋体"/>
               </a:rPr>
-              <a:t>  1. 三级差别定价（市场分割）利润最大化定理</a:t>
+              <a:t>1. 三级差别定价（市场分割）利润最大化定理</a:t>
             </a:r>
           </a:p>
         </p:txBody>
@@ -6017,7 +6017,7 @@
                 <a:latin typeface="Times New Roman"/>
                 <a:ea typeface="宋体"/>
               </a:rPr>
-              <a:t>（1）跨市场边际收益相等法则： </a:t>
+              <a:t>（1）跨市场边际收益相等法则：</a:t>
             </a:r>
             <a:r>
               <a:rPr sz="1250" b="0">
@@ -6027,7 +6027,7 @@
                 <a:latin typeface="Times New Roman"/>
                 <a:ea typeface="宋体"/>
               </a:rPr>
-              <a:t>MR_1 = MR_2 = ... = MR_n = MC</a:t>
+              <a:t>MR₁ = MR₂ = ... = MRₙ = MC</a:t>
             </a:r>
           </a:p>
           <a:p>
@@ -6047,7 +6047,7 @@
                 <a:latin typeface="Times New Roman"/>
                 <a:ea typeface="宋体"/>
               </a:rPr>
-              <a:t>（2）展开为价格弹性代数方程： </a:t>
+              <a:t>（2）展开为价格弹性代数方程：</a:t>
             </a:r>
             <a:r>
               <a:rPr sz="1250" b="0">
@@ -6057,7 +6057,7 @@
                 <a:latin typeface="Times New Roman"/>
                 <a:ea typeface="宋体"/>
               </a:rPr>
-              <a:t>P_1 (1 - \frac{1}{|E_{p1}|}) = P_2 (1 - \frac{1}{|E_{p2}|}) = MC</a:t>
+              <a:t>P₁ (1 - 1 / (|Ep₁|)) = P₂ (1 - 1 / (|Ep₂|)) = MC</a:t>
             </a:r>
           </a:p>
           <a:p>
@@ -6077,7 +6077,7 @@
                 <a:latin typeface="Times New Roman"/>
                 <a:ea typeface="宋体"/>
               </a:rPr>
-              <a:t>（3）逆弹性定价准则： </a:t>
+              <a:t>（3）逆弹性定价准则：</a:t>
             </a:r>
             <a:r>
               <a:rPr sz="1250" b="0">
@@ -6087,7 +6087,7 @@
                 <a:latin typeface="Times New Roman"/>
                 <a:ea typeface="宋体"/>
               </a:rPr>
-              <a:t>\frac{P_1}{P_2} = \frac{1 - 1/|E_{p2}|}{1 - 1/|E_{p1}|} \implies 需求价格弹性较小的市场定高价，需求价格弹性较大的市场定低价！</a:t>
+              <a:t>(P₁) / (P₂) = (1 - 1/|Ep₂|) / (1 - 1/|Ep₁|) ⇒ 需求价格弹性较小的市场定高价，需求价格弹性较大的市场定低价！</a:t>
             </a:r>
           </a:p>
         </p:txBody>
@@ -6187,7 +6187,7 @@
                 <a:latin typeface="Times New Roman"/>
                 <a:ea typeface="宋体"/>
               </a:rPr>
-              <a:t>  2. 例7-6：软件企业版与教育版差别定价演算</a:t>
+              <a:t>2. 例7-6：软件企业版与教育版差别定价演算</a:t>
             </a:r>
           </a:p>
         </p:txBody>
@@ -6230,7 +6230,7 @@
                 <a:latin typeface="Times New Roman"/>
                 <a:ea typeface="宋体"/>
               </a:rPr>
-              <a:t>（1）企业市场需求函数： </a:t>
+              <a:t>（1）企业市场需求函数：</a:t>
             </a:r>
             <a:r>
               <a:rPr sz="1250" b="0">
@@ -6240,7 +6240,7 @@
                 <a:latin typeface="Times New Roman"/>
                 <a:ea typeface="宋体"/>
               </a:rPr>
-              <a:t>P_1 = 100 - Q_1 \implies MR_1 = 100 - 2Q_1；学生教育市场：P_2 = 60 - 0.5Q_2 \implies MR_2 = 60 - Q_2。</a:t>
+              <a:t>P₁ = 100 - Q₁ ⇒ MR₁ = 100 - 2Q₁；学生教育市场：P₂ = 60 - 0.5Q₂ ⇒ MR₂ = 60 - Q₂。</a:t>
             </a:r>
           </a:p>
           <a:p>
@@ -6260,7 +6260,7 @@
                 <a:latin typeface="Times New Roman"/>
                 <a:ea typeface="宋体"/>
               </a:rPr>
-              <a:t>（2）边际成本 MC = 20 元。联立求解： </a:t>
+              <a:t>（2）边际成本 MC = 20 元。联立求解：</a:t>
             </a:r>
             <a:r>
               <a:rPr sz="1250" b="0">
@@ -6270,7 +6270,7 @@
                 <a:latin typeface="Times New Roman"/>
                 <a:ea typeface="宋体"/>
               </a:rPr>
-              <a:t>100 - 2Q_1 = 20 \implies Q_1 = 40, P_1 = 60 元；60 - Q_2 = 20 \implies Q_2 = 40, P_2 = 40 元！</a:t>
+              <a:t>100 - 2Q₁ = 20 ⇒ Q₁ = 40, P₁ = 60 元；60 - Q₂ = 20 ⇒ Q₂ = 40, P₂ = 40 元！</a:t>
             </a:r>
           </a:p>
           <a:p>
@@ -6290,7 +6290,7 @@
                 <a:latin typeface="Times New Roman"/>
                 <a:ea typeface="宋体"/>
               </a:rPr>
-              <a:t>（3）管理启示： </a:t>
+              <a:t>（3）管理启示：</a:t>
             </a:r>
             <a:r>
               <a:rPr sz="1250" b="0">
@@ -6357,7 +6357,7 @@
                 <a:latin typeface="Times New Roman"/>
                 <a:ea typeface="宋体"/>
               </a:rPr>
-              <a:t>  ★ 核心要点：三级差别定价是民航机票收益管理、软件跨行业定价与影院学生优惠票的核心理论基石。</a:t>
+              <a:t>★ 核心要点：三级差别定价是民航机票收益管理、软件跨行业定价与影院学生优惠票的核心理论基石。</a:t>
             </a:r>
           </a:p>
         </p:txBody>
@@ -6764,7 +6764,7 @@
                 <a:latin typeface="Times New Roman"/>
                 <a:ea typeface="宋体"/>
               </a:rPr>
-              <a:t>  1. 两部收费制（Two-Part Tariff）模型机制</a:t>
+              <a:t>1. 两部收费制（Two-Part Tariff）模型机制</a:t>
             </a:r>
           </a:p>
         </p:txBody>
@@ -6807,7 +6807,7 @@
                 <a:latin typeface="Times New Roman"/>
                 <a:ea typeface="宋体"/>
               </a:rPr>
-              <a:t>（1）双重收费结构： </a:t>
+              <a:t>（1）双重收费结构：</a:t>
             </a:r>
             <a:r>
               <a:rPr sz="1250" b="0">
@@ -6837,7 +6837,7 @@
                 <a:latin typeface="Times New Roman"/>
                 <a:ea typeface="宋体"/>
               </a:rPr>
-              <a:t>（2）最优定价定理： </a:t>
+              <a:t>（2）最优定价定理：</a:t>
             </a:r>
             <a:r>
               <a:rPr sz="1250" b="0">
@@ -6867,7 +6867,7 @@
                 <a:latin typeface="Times New Roman"/>
                 <a:ea typeface="宋体"/>
               </a:rPr>
-              <a:t>（3）商业范例： </a:t>
+              <a:t>（3）商业范例：</a:t>
             </a:r>
             <a:r>
               <a:rPr sz="1250" b="0">
@@ -6977,7 +6977,7 @@
                 <a:latin typeface="Times New Roman"/>
                 <a:ea typeface="宋体"/>
               </a:rPr>
-              <a:t>  2. Costco（开市客）仓储会员制商业帝国</a:t>
+              <a:t>2. Costco（开市客）仓储会员制商业帝国</a:t>
             </a:r>
           </a:p>
         </p:txBody>
@@ -7020,7 +7020,7 @@
                 <a:latin typeface="Times New Roman"/>
                 <a:ea typeface="宋体"/>
               </a:rPr>
-              <a:t>（1）极低商品毛利（P ≈ MC）： </a:t>
+              <a:t>（1）极低商品毛利（P ≈ MC）：</a:t>
             </a:r>
             <a:r>
               <a:rPr sz="1250" b="0">
@@ -7050,7 +7050,7 @@
                 <a:latin typeface="Times New Roman"/>
                 <a:ea typeface="宋体"/>
               </a:rPr>
-              <a:t>（2）会员费贡献 70%+ 纯利润： </a:t>
+              <a:t>（2）会员费贡献 70%+ 纯利润：</a:t>
             </a:r>
             <a:r>
               <a:rPr sz="1250" b="0">
@@ -7117,7 +7117,7 @@
                 <a:latin typeface="Times New Roman"/>
                 <a:ea typeface="宋体"/>
               </a:rPr>
-              <a:t>  ★ 核心要点：两部收费制巧妙地将消费者剩余转化为企业无风险固定收入，实现了用户粘性与企业盈利的双赢。</a:t>
+              <a:t>★ 核心要点：两部收费制巧妙地将消费者剩余转化为企业无风险固定收入，实现了用户粘性与企业盈利的双赢。</a:t>
             </a:r>
           </a:p>
         </p:txBody>
@@ -7831,7 +7831,7 @@
                 <a:latin typeface="Times New Roman"/>
                 <a:ea typeface="宋体"/>
               </a:rPr>
-              <a:t>  1. 高峰负荷定价法（Peak-Load Pricing）适用特征</a:t>
+              <a:t>1. 高峰负荷定价法（Peak-Load Pricing）适用特征</a:t>
             </a:r>
           </a:p>
         </p:txBody>
@@ -7874,7 +7874,7 @@
                 <a:latin typeface="Times New Roman"/>
                 <a:ea typeface="宋体"/>
               </a:rPr>
-              <a:t>（1）行业特征： </a:t>
+              <a:t>（1）行业特征：</a:t>
             </a:r>
             <a:r>
               <a:rPr sz="1250" b="0">
@@ -7904,7 +7904,7 @@
                 <a:latin typeface="Times New Roman"/>
                 <a:ea typeface="宋体"/>
               </a:rPr>
-              <a:t>（2）固定容量成本分摊铁律： </a:t>
+              <a:t>（2）固定容量成本分摊铁律：</a:t>
             </a:r>
             <a:r>
               <a:rPr sz="1250" b="0">
@@ -7934,7 +7934,7 @@
                 <a:latin typeface="Times New Roman"/>
                 <a:ea typeface="宋体"/>
               </a:rPr>
-              <a:t>（3）谷期定价准则： </a:t>
+              <a:t>（3）谷期定价准则：</a:t>
             </a:r>
             <a:r>
               <a:rPr sz="1250" b="0">
@@ -7944,7 +7944,7 @@
                 <a:latin typeface="Times New Roman"/>
                 <a:ea typeface="宋体"/>
               </a:rPr>
-              <a:t>平谷期富余产能充裕，谷期用户只需承担运行边际变动成本（P_{off} = MC_{running}）。</a:t>
+              <a:t>平谷期富余产能充裕，谷期用户只需承担运行边际变动成本（P_off = MC_running）。</a:t>
             </a:r>
           </a:p>
         </p:txBody>
@@ -8044,7 +8044,7 @@
                 <a:latin typeface="Times New Roman"/>
                 <a:ea typeface="宋体"/>
               </a:rPr>
-              <a:t>  2. 案例7-3：上海峰谷电价改革的社会经济效益</a:t>
+              <a:t>2. 案例7-3：上海峰谷电价改革的社会经济效益</a:t>
             </a:r>
           </a:p>
         </p:txBody>
@@ -8087,7 +8087,7 @@
                 <a:latin typeface="Times New Roman"/>
                 <a:ea typeface="宋体"/>
               </a:rPr>
-              <a:t>（1）商业机制： </a:t>
+              <a:t>（1）商业机制：</a:t>
             </a:r>
             <a:r>
               <a:rPr sz="1250" b="0">
@@ -8117,7 +8117,7 @@
                 <a:latin typeface="Times New Roman"/>
                 <a:ea typeface="宋体"/>
               </a:rPr>
-              <a:t>（2）削峰填谷效益： </a:t>
+              <a:t>（2）削峰填谷效益：</a:t>
             </a:r>
             <a:r>
               <a:rPr sz="1250" b="0">
@@ -8184,7 +8184,7 @@
                 <a:latin typeface="Times New Roman"/>
                 <a:ea typeface="宋体"/>
               </a:rPr>
-              <a:t>  ★ 核心要点：高峰负荷定价兼顾了资源配置效率与企业财务可行性，是现代公用事业与收益管理的核心典范。</a:t>
+              <a:t>★ 核心要点：高峰负荷定价兼顾了资源配置效率与企业财务可行性，是现代公用事业与收益管理的核心典范。</a:t>
             </a:r>
           </a:p>
         </p:txBody>
@@ -8898,7 +8898,7 @@
                 <a:latin typeface="Times New Roman"/>
                 <a:ea typeface="宋体"/>
               </a:rPr>
-              <a:t>  1. 需求关联产品定价策略（互补品与替代品）</a:t>
+              <a:t>1. 需求关联产品定价策略（互补品与替代品）</a:t>
             </a:r>
           </a:p>
         </p:txBody>
@@ -8941,7 +8941,7 @@
                 <a:latin typeface="Times New Roman"/>
                 <a:ea typeface="宋体"/>
               </a:rPr>
-              <a:t>（1）互补品联动定价： </a:t>
+              <a:t>（1）互补品联动定价：</a:t>
             </a:r>
             <a:r>
               <a:rPr sz="1250" b="0">
@@ -8971,7 +8971,7 @@
                 <a:latin typeface="Times New Roman"/>
                 <a:ea typeface="宋体"/>
               </a:rPr>
-              <a:t>（2）替代品系列定价： </a:t>
+              <a:t>（2）替代品系列定价：</a:t>
             </a:r>
             <a:r>
               <a:rPr sz="1250" b="0">
@@ -9081,7 +9081,7 @@
                 <a:latin typeface="Times New Roman"/>
                 <a:ea typeface="宋体"/>
               </a:rPr>
-              <a:t>  2. 生产关联产品（联产品 Joint Products）定价（例7-7/7-8）</a:t>
+              <a:t>2. 生产关联产品（联产品 Joint Products）定价（例7-7/7-8）</a:t>
             </a:r>
           </a:p>
         </p:txBody>
@@ -9124,7 +9124,7 @@
                 <a:latin typeface="Times New Roman"/>
                 <a:ea typeface="宋体"/>
               </a:rPr>
-              <a:t>（1）固定比例产出联产品（如原油炼化汽油与柴油）： </a:t>
+              <a:t>（1）固定比例产出联产品（如原油炼化汽油与柴油）：</a:t>
             </a:r>
             <a:r>
               <a:rPr sz="1250" b="0">
@@ -9134,7 +9134,7 @@
                 <a:latin typeface="Times New Roman"/>
                 <a:ea typeface="宋体"/>
               </a:rPr>
-              <a:t>分离点前发生的联合成本属于沉没成本，不能人为机械分摊；必须按各联产品的边际收入垂直加总 \sum MR = MC 确定总产量，并在各自分市场上分别按供求出清定价！</a:t>
+              <a:t>分离点前发生的联合成本属于沉没成本，不能人为机械分摊；必须按各联产品的边际收入垂直加总 ∑ MR = MC 确定总产量，并在各自分市场上分别按供求出清定价！</a:t>
             </a:r>
           </a:p>
           <a:p>
@@ -9154,7 +9154,7 @@
                 <a:latin typeface="Times New Roman"/>
                 <a:ea typeface="宋体"/>
               </a:rPr>
-              <a:t>（2）可变比例联产品： </a:t>
+              <a:t>（2）可变比例联产品：</a:t>
             </a:r>
             <a:r>
               <a:rPr sz="1250" b="0">
@@ -9221,7 +9221,7 @@
                 <a:latin typeface="Times New Roman"/>
                 <a:ea typeface="宋体"/>
               </a:rPr>
-              <a:t>  ★ 核心要点：多产品定价要求管理者彻底摒弃单品割裂思维，统筹把握需求网络关联与生产联合成本。</a:t>
+              <a:t>★ 核心要点：多产品定价要求管理者彻底摒弃单品割裂思维，统筹把握需求网络关联与生产联合成本。</a:t>
             </a:r>
           </a:p>
         </p:txBody>
@@ -9628,7 +9628,7 @@
                 <a:latin typeface="Times New Roman"/>
                 <a:ea typeface="宋体"/>
               </a:rPr>
-              <a:t>  1. 纯捆绑销售（Pure Bundling）vs 混合捆绑（Mixed Bundling）</a:t>
+              <a:t>1. 纯捆绑销售（Pure Bundling）vs 混合捆绑（Mixed Bundling）</a:t>
             </a:r>
           </a:p>
         </p:txBody>
@@ -9671,7 +9671,7 @@
                 <a:latin typeface="Times New Roman"/>
                 <a:ea typeface="宋体"/>
               </a:rPr>
-              <a:t>（1）纯捆绑销售： </a:t>
+              <a:t>（1）纯捆绑销售：</a:t>
             </a:r>
             <a:r>
               <a:rPr sz="1250" b="0">
@@ -9701,7 +9701,7 @@
                 <a:latin typeface="Times New Roman"/>
                 <a:ea typeface="宋体"/>
               </a:rPr>
-              <a:t>（2）混合捆绑销售： </a:t>
+              <a:t>（2）混合捆绑销售：</a:t>
             </a:r>
             <a:r>
               <a:rPr sz="1250" b="0">
@@ -9731,7 +9731,7 @@
                 <a:latin typeface="Times New Roman"/>
                 <a:ea typeface="宋体"/>
               </a:rPr>
-              <a:t>（3）异质偏好提取： </a:t>
+              <a:t>（3）异质偏好提取：</a:t>
             </a:r>
             <a:r>
               <a:rPr sz="1250" b="0">
@@ -9841,7 +9841,7 @@
                 <a:latin typeface="Times New Roman"/>
                 <a:ea typeface="宋体"/>
               </a:rPr>
-              <a:t>  2. 捆绑销售收益矩阵经典算例</a:t>
+              <a:t>2. 捆绑销售收益矩阵经典算例</a:t>
             </a:r>
           </a:p>
         </p:txBody>
@@ -9884,7 +9884,7 @@
                 <a:latin typeface="Times New Roman"/>
                 <a:ea typeface="宋体"/>
               </a:rPr>
-              <a:t>（2）单品独立销售： </a:t>
+              <a:t>（2）单品独立销售：</a:t>
             </a:r>
             <a:r>
               <a:rPr sz="1250" b="0">
@@ -9934,7 +9934,7 @@
                 <a:latin typeface="Times New Roman"/>
                 <a:ea typeface="宋体"/>
               </a:rPr>
-              <a:t>（3）捆绑打包销售： </a:t>
+              <a:t>（3）捆绑打包销售：</a:t>
             </a:r>
             <a:r>
               <a:rPr sz="1250" b="0">
@@ -10001,7 +10001,7 @@
                 <a:latin typeface="Times New Roman"/>
                 <a:ea typeface="宋体"/>
               </a:rPr>
-              <a:t>  ★ 核心要点：捆绑销售通过抹平消费者单品保留价格的离散方差，实现了对跨品类消费者剩余的高效捕获。</a:t>
+              <a:t>★ 核心要点：捆绑销售通过抹平消费者单品保留价格的离散方差，实现了对跨品类消费者剩余的高效捕获。</a:t>
             </a:r>
           </a:p>
         </p:txBody>
@@ -12310,7 +12310,7 @@
                 <a:latin typeface="Times New Roman"/>
                 <a:ea typeface="宋体"/>
               </a:rPr>
-              <a:t>  1. 存在完全竞争外部市场情况</a:t>
+              <a:t>1. 存在完全竞争外部市场情况</a:t>
             </a:r>
           </a:p>
         </p:txBody>
@@ -12353,7 +12353,7 @@
                 <a:latin typeface="Times New Roman"/>
                 <a:ea typeface="宋体"/>
               </a:rPr>
-              <a:t>（1）黄金定价法则： </a:t>
+              <a:t>（1）黄金定价法则：</a:t>
             </a:r>
             <a:r>
               <a:rPr sz="1250" b="0">
@@ -12363,7 +12363,7 @@
                 <a:latin typeface="Times New Roman"/>
                 <a:ea typeface="宋体"/>
               </a:rPr>
-              <a:t>转移价格严格等于现行外部公允市价 P_{market}（Transfer Price = P_{market}）。</a:t>
+              <a:t>转移价格严格等于现行外部公允市价 P_market（Transfer Price = P_market）。</a:t>
             </a:r>
           </a:p>
           <a:p>
@@ -12383,7 +12383,7 @@
                 <a:latin typeface="Times New Roman"/>
                 <a:ea typeface="宋体"/>
               </a:rPr>
-              <a:t>（2）管理机理： </a:t>
+              <a:t>（2）管理机理：</a:t>
             </a:r>
             <a:r>
               <a:rPr sz="1250" b="0">
@@ -12493,7 +12493,7 @@
                 <a:latin typeface="Times New Roman"/>
                 <a:ea typeface="宋体"/>
               </a:rPr>
-              <a:t>  2. 不存在外部竞争市场情况（封闭内部流转）</a:t>
+              <a:t>2. 不存在外部竞争市场情况（封闭内部流转）</a:t>
             </a:r>
           </a:p>
         </p:txBody>
@@ -12536,7 +12536,7 @@
                 <a:latin typeface="Times New Roman"/>
                 <a:ea typeface="宋体"/>
               </a:rPr>
-              <a:t>（1）黄金定价法则： </a:t>
+              <a:t>（1）黄金定价法则：</a:t>
             </a:r>
             <a:r>
               <a:rPr sz="1250" b="0">
@@ -12546,7 +12546,7 @@
                 <a:latin typeface="Times New Roman"/>
                 <a:ea typeface="宋体"/>
               </a:rPr>
-              <a:t>转移价格必须严格等于制造分部的真实边际成本 MC（Transfer Price = MC_{mfg}）！</a:t>
+              <a:t>转移价格必须严格等于制造分部的真实边际成本 MC（Transfer Price = MC_mfg）！</a:t>
             </a:r>
           </a:p>
           <a:p>
@@ -12566,7 +12566,7 @@
                 <a:latin typeface="Times New Roman"/>
                 <a:ea typeface="宋体"/>
               </a:rPr>
-              <a:t>（2）双重加价致命陷阱： </a:t>
+              <a:t>（2）双重加价致命陷阱：</a:t>
             </a:r>
             <a:r>
               <a:rPr sz="1250" b="0">
@@ -12633,7 +12633,7 @@
                 <a:latin typeface="Times New Roman"/>
                 <a:ea typeface="宋体"/>
               </a:rPr>
-              <a:t>  ★ 核心要点：科学的转移定价能够彻底消除内部独立核算事业部之间的利益摩擦，实现全企业集团价值最大化协同。</a:t>
+              <a:t>★ 核心要点：科学的转移定价能够彻底消除内部独立核算事业部之间的利益摩擦，实现全企业集团价值最大化协同。</a:t>
             </a:r>
           </a:p>
         </p:txBody>
@@ -13040,7 +13040,7 @@
                 <a:latin typeface="Times New Roman"/>
                 <a:ea typeface="宋体"/>
               </a:rPr>
-              <a:t>  成本加成与增量定价</a:t>
+              <a:t>成本加成与增量定价</a:t>
             </a:r>
           </a:p>
         </p:txBody>
@@ -13244,7 +13244,7 @@
                 <a:latin typeface="Times New Roman"/>
                 <a:ea typeface="宋体"/>
               </a:rPr>
-              <a:t>  招投标与差别定价</a:t>
+              <a:t>招投标与差别定价</a:t>
             </a:r>
           </a:p>
         </p:txBody>
@@ -13448,7 +13448,7 @@
                 <a:latin typeface="Times New Roman"/>
                 <a:ea typeface="宋体"/>
               </a:rPr>
-              <a:t>  高峰负荷与动态调节</a:t>
+              <a:t>高峰负荷与动态调节</a:t>
             </a:r>
           </a:p>
         </p:txBody>
@@ -13652,7 +13652,7 @@
                 <a:latin typeface="Times New Roman"/>
                 <a:ea typeface="宋体"/>
               </a:rPr>
-              <a:t>  中间产品转移定价</a:t>
+              <a:t>中间产品转移定价</a:t>
             </a:r>
           </a:p>
         </p:txBody>
@@ -13813,7 +13813,7 @@
                 <a:latin typeface="Times New Roman"/>
                 <a:ea typeface="宋体"/>
               </a:rPr>
-              <a:t>  ★ 战略结语：定价是商业模式变现的终极惊险一跃，将边际成本、需求弹性与多业务协同熔铸为卓越的定价艺术。</a:t>
+              <a:t>★ 战略结语：定价是商业模式变现的终极惊险一跃，将边际成本、需求弹性与多业务协同熔铸为卓越的定价艺术。</a:t>
             </a:r>
           </a:p>
         </p:txBody>
@@ -14220,7 +14220,7 @@
                 <a:latin typeface="Times New Roman"/>
                 <a:ea typeface="宋体"/>
               </a:rPr>
-              <a:t>  课后复习思考题与 MBA 讨论案例（严格对应课本习题）</a:t>
+              <a:t>课后复习思考题与 MBA 讨论案例（严格对应课本习题）</a:t>
             </a:r>
           </a:p>
         </p:txBody>
@@ -14263,7 +14263,7 @@
                 <a:latin typeface="Times New Roman"/>
                 <a:ea typeface="宋体"/>
               </a:rPr>
-              <a:t>1. </a:t>
+              <a:t>1.</a:t>
             </a:r>
             <a:r>
               <a:rPr sz="1250" b="0">
@@ -14293,7 +14293,7 @@
                 <a:latin typeface="Times New Roman"/>
                 <a:ea typeface="宋体"/>
               </a:rPr>
-              <a:t>2. </a:t>
+              <a:t>2.</a:t>
             </a:r>
             <a:r>
               <a:rPr sz="1250" b="0">
@@ -14323,7 +14323,7 @@
                 <a:latin typeface="Times New Roman"/>
                 <a:ea typeface="宋体"/>
               </a:rPr>
-              <a:t>3. </a:t>
+              <a:t>3.</a:t>
             </a:r>
             <a:r>
               <a:rPr sz="1250" b="0">
@@ -14353,7 +14353,7 @@
                 <a:latin typeface="Times New Roman"/>
                 <a:ea typeface="宋体"/>
               </a:rPr>
-              <a:t>4. </a:t>
+              <a:t>4.</a:t>
             </a:r>
             <a:r>
               <a:rPr sz="1250" b="0">
@@ -14383,7 +14383,7 @@
                 <a:latin typeface="Times New Roman"/>
                 <a:ea typeface="宋体"/>
               </a:rPr>
-              <a:t>5. </a:t>
+              <a:t>5.</a:t>
             </a:r>
             <a:r>
               <a:rPr sz="1250" b="0">
@@ -14413,7 +14413,7 @@
                 <a:latin typeface="Times New Roman"/>
                 <a:ea typeface="宋体"/>
               </a:rPr>
-              <a:t>6. </a:t>
+              <a:t>6.</a:t>
             </a:r>
             <a:r>
               <a:rPr sz="1250" b="0">
@@ -14423,7 +14423,7 @@
                 <a:latin typeface="Times New Roman"/>
                 <a:ea typeface="宋体"/>
               </a:rPr>
-              <a:t>【作业题2】某软件公司开发出一套财务软件，在企业市场需求为 P_1 = 5000 - 10Q_1，在高校科研市场需求为 P_2 = 2000 - 10Q_2。软件复制边际成本 MC = 200 元。求实行三级差别定价时的最优价格 P_1, P_2 及各自销量。</a:t>
+              <a:t>【作业题2】某软件公司开发出一套财务软件，在企业市场需求为 P₁ = 5000 - 10Q₁，在高校科研市场需求为 P₂ = 2000 - 10Q₂。软件复制边际成本 MC = 200 元。求实行三级差别定价时的最优价格 P₁, P₂ 及各自销量。</a:t>
             </a:r>
           </a:p>
         </p:txBody>
@@ -15137,7 +15137,7 @@
                 <a:latin typeface="Times New Roman"/>
                 <a:ea typeface="宋体"/>
               </a:rPr>
-              <a:t>  1. 成本加成定价法实务三步流程</a:t>
+              <a:t>1. 成本加成定价法实务三步流程</a:t>
             </a:r>
           </a:p>
         </p:txBody>
@@ -15180,7 +15180,7 @@
                 <a:latin typeface="Times New Roman"/>
                 <a:ea typeface="宋体"/>
               </a:rPr>
-              <a:t>（1）估算正常产能下的单位平均成本： </a:t>
+              <a:t>（1）估算正常产能下的单位平均成本：</a:t>
             </a:r>
             <a:r>
               <a:rPr sz="1250" b="0">
@@ -15210,7 +15210,7 @@
                 <a:latin typeface="Times New Roman"/>
                 <a:ea typeface="宋体"/>
               </a:rPr>
-              <a:t>（2）确定目标成本加成率 m： </a:t>
+              <a:t>（2）确定目标成本加成率 m：</a:t>
             </a:r>
             <a:r>
               <a:rPr sz="1250" b="0">
@@ -15240,7 +15240,7 @@
                 <a:latin typeface="Times New Roman"/>
                 <a:ea typeface="宋体"/>
               </a:rPr>
-              <a:t>（3）制定最终销售价格： </a:t>
+              <a:t>（3）制定最终销售价格：</a:t>
             </a:r>
             <a:r>
               <a:rPr sz="1250" b="0">
@@ -15250,7 +15250,7 @@
                 <a:latin typeface="Times New Roman"/>
                 <a:ea typeface="宋体"/>
               </a:rPr>
-              <a:t>P = AC + AC \cdot m = AC (1 + m)</a:t>
+              <a:t>P = AC + AC · m = AC (1 + m)</a:t>
             </a:r>
           </a:p>
         </p:txBody>
@@ -15350,7 +15350,7 @@
                 <a:latin typeface="Times New Roman"/>
                 <a:ea typeface="宋体"/>
               </a:rPr>
-              <a:t>  2. 商业流行根源与致命财务局限</a:t>
+              <a:t>2. 商业流行根源与致命财务局限</a:t>
             </a:r>
           </a:p>
         </p:txBody>
@@ -15393,7 +15393,7 @@
                 <a:latin typeface="Times New Roman"/>
                 <a:ea typeface="宋体"/>
               </a:rPr>
-              <a:t>（1）商业广泛流行根源： </a:t>
+              <a:t>（1）商业广泛流行根源：</a:t>
             </a:r>
             <a:r>
               <a:rPr sz="1250" b="0">
@@ -15423,7 +15423,7 @@
                 <a:latin typeface="Times New Roman"/>
                 <a:ea typeface="宋体"/>
               </a:rPr>
-              <a:t>（2）致命财务逻辑缺陷： </a:t>
+              <a:t>（2）致命财务逻辑缺陷：</a:t>
             </a:r>
             <a:r>
               <a:rPr sz="1250" b="0">
@@ -15490,7 +15490,7 @@
                 <a:latin typeface="Times New Roman"/>
                 <a:ea typeface="宋体"/>
               </a:rPr>
-              <a:t>  ★ 核心要点：成本加成法虽然简便实用，但若脱离市场需求弹性则极易导致企业定价陷入死胡同。</a:t>
+              <a:t>★ 核心要点：成本加成法虽然简便实用，但若脱离市场需求弹性则极易导致企业定价陷入死胡同。</a:t>
             </a:r>
           </a:p>
         </p:txBody>
@@ -15897,7 +15897,7 @@
                 <a:latin typeface="Times New Roman"/>
                 <a:ea typeface="宋体"/>
               </a:rPr>
-              <a:t>  1. 最优加成率公式严格推导</a:t>
+              <a:t>1. 最优加成率公式严格推导</a:t>
             </a:r>
           </a:p>
         </p:txBody>
@@ -15940,7 +15940,7 @@
                 <a:latin typeface="Times New Roman"/>
                 <a:ea typeface="宋体"/>
               </a:rPr>
-              <a:t>（1）边际收入公式展开： </a:t>
+              <a:t>（1）边际收入公式展开：</a:t>
             </a:r>
             <a:r>
               <a:rPr sz="1250" b="0">
@@ -15950,7 +15950,7 @@
                 <a:latin typeface="Times New Roman"/>
                 <a:ea typeface="宋体"/>
               </a:rPr>
-              <a:t>MR = P(1 - \frac{1}{|E_p|})</a:t>
+              <a:t>MR = P(1 - 1 / (|Ep|))</a:t>
             </a:r>
           </a:p>
           <a:p>
@@ -15970,7 +15970,7 @@
                 <a:latin typeface="Times New Roman"/>
                 <a:ea typeface="宋体"/>
               </a:rPr>
-              <a:t>（2）代入利润最大化条件 MR=MC： </a:t>
+              <a:t>（2）代入利润最大化条件 MR=MC：</a:t>
             </a:r>
             <a:r>
               <a:rPr sz="1250" b="0">
@@ -15980,7 +15980,7 @@
                 <a:latin typeface="Times New Roman"/>
                 <a:ea typeface="宋体"/>
               </a:rPr>
-              <a:t>P(1 - \frac{1}{|E_p|}) = MC \implies P = MC \cdot \frac{|E_p|}{|E_p| - 1}</a:t>
+              <a:t>P(1 - 1 / (|Ep|)) = MC ⇒ P = MC · (|Ep|) / (|Ep| - 1)</a:t>
             </a:r>
           </a:p>
           <a:p>
@@ -16000,7 +16000,7 @@
                 <a:latin typeface="Times New Roman"/>
                 <a:ea typeface="宋体"/>
               </a:rPr>
-              <a:t>（3）假定短期内 MC ≈ AC，联立 P = AC(1+m)： </a:t>
+              <a:t>（3）假定短期内 MC ≈ AC，联立 P = AC(1+m)：</a:t>
             </a:r>
             <a:r>
               <a:rPr sz="1250" b="0">
@@ -16010,7 +16010,7 @@
                 <a:latin typeface="Times New Roman"/>
                 <a:ea typeface="宋体"/>
               </a:rPr>
-              <a:t>AC(1 + m^*) = AC \cdot \frac{|E_p|}{|E_p| - 1} \implies 1 + m^* = 1 + \frac{1}{|E_p| - 1}</a:t>
+              <a:t>AC(1 + m*) = AC · (|Ep|) / (|Ep| - 1) ⇒ 1 + m* = 1 + 1 / (|Ep| - 1)</a:t>
             </a:r>
           </a:p>
           <a:p>
@@ -16030,7 +16030,7 @@
                 <a:latin typeface="Times New Roman"/>
                 <a:ea typeface="宋体"/>
               </a:rPr>
-              <a:t>（4）最优加成率黄金公式： </a:t>
+              <a:t>（4）最优加成率黄金公式：</a:t>
             </a:r>
             <a:r>
               <a:rPr sz="1250" b="0">
@@ -16040,7 +16040,7 @@
                 <a:latin typeface="Times New Roman"/>
                 <a:ea typeface="宋体"/>
               </a:rPr>
-              <a:t>m^* = \frac{1}{|E_p| - 1} \implies |E_p|=2 时 m^*=100\%；|E_p|=5 时 m^*=25\%！</a:t>
+              <a:t>m* = 1 / (|Ep| - 1) ⇒ |Ep|=2 时 m*=100%；|Ep|=5 时 m*=25%！</a:t>
             </a:r>
           </a:p>
         </p:txBody>
@@ -16140,7 +16140,7 @@
                 <a:latin typeface="Times New Roman"/>
                 <a:ea typeface="宋体"/>
               </a:rPr>
-              <a:t>  2. 案例7-1：百货公司各品类加成率实证</a:t>
+              <a:t>2. 案例7-1：百货公司各品类加成率实证</a:t>
             </a:r>
           </a:p>
         </p:txBody>
@@ -16183,7 +16183,7 @@
                 <a:latin typeface="Times New Roman"/>
                 <a:ea typeface="宋体"/>
               </a:rPr>
-              <a:t>（1）日用百货与生鲜粮油： </a:t>
+              <a:t>（1）日用百货与生鲜粮油：</a:t>
             </a:r>
             <a:r>
               <a:rPr sz="1250" b="0">
@@ -16193,7 +16193,7 @@
                 <a:latin typeface="Times New Roman"/>
                 <a:ea typeface="宋体"/>
               </a:rPr>
-              <a:t>替代品多且价格弹性极大（|E_p| \ge 4），最优加成率仅设为 10%~20%（薄利多销）。</a:t>
+              <a:t>替代品多且价格弹性极大（|Ep| ≥ 4），最优加成率仅设为 10%~20%（薄利多销）。</a:t>
             </a:r>
           </a:p>
           <a:p>
@@ -16213,7 +16213,7 @@
                 <a:latin typeface="Times New Roman"/>
                 <a:ea typeface="宋体"/>
               </a:rPr>
-              <a:t>（2）高档服饰与高端珠宝： </a:t>
+              <a:t>（2）高档服饰与高端珠宝：</a:t>
             </a:r>
             <a:r>
               <a:rPr sz="1250" b="0">
@@ -16223,7 +16223,7 @@
                 <a:latin typeface="Times New Roman"/>
                 <a:ea typeface="宋体"/>
               </a:rPr>
-              <a:t>独特性强且价格弹性极小（|E_p| \approx 1.3），最优加成率高达 200%~300%！</a:t>
+              <a:t>独特性强且价格弹性极小（|Ep| ≈ 1.3），最优加成率高达 200%~300%！</a:t>
             </a:r>
           </a:p>
         </p:txBody>
@@ -16280,7 +16280,7 @@
                 <a:latin typeface="Times New Roman"/>
                 <a:ea typeface="宋体"/>
               </a:rPr>
-              <a:t>  ★ 核心要点：最优加成率公式将经验主义的成本加成与微观边际最优化理论完美统一，弹性越大加成率必须越低。</a:t>
+              <a:t>★ 核心要点：最优加成率公式将经验主义的成本加成与微观边际最优化理论完美统一，弹性越大加成率必须越低。</a:t>
             </a:r>
           </a:p>
         </p:txBody>
@@ -16994,7 +16994,7 @@
                 <a:latin typeface="Times New Roman"/>
                 <a:ea typeface="宋体"/>
               </a:rPr>
-              <a:t>  1. 增量分析定价法（Incremental Pricing）核心逻辑</a:t>
+              <a:t>1. 增量分析定价法（Incremental Pricing）核心逻辑</a:t>
             </a:r>
           </a:p>
         </p:txBody>
@@ -17037,7 +17037,7 @@
                 <a:latin typeface="Times New Roman"/>
                 <a:ea typeface="宋体"/>
               </a:rPr>
-              <a:t>（1）核心决策原则： </a:t>
+              <a:t>（1）核心决策原则：</a:t>
             </a:r>
             <a:r>
               <a:rPr sz="1250" b="0">
@@ -17047,7 +17047,7 @@
                 <a:latin typeface="Times New Roman"/>
                 <a:ea typeface="宋体"/>
               </a:rPr>
-              <a:t>仅分析由于采纳某项定价决策所引起的未来增量收入 \Delta TR 与增量成本 \Delta TC。</a:t>
+              <a:t>仅分析由于采纳某项定价决策所引起的未来增量收入 Δ TR 与增量成本 Δ TC。</a:t>
             </a:r>
           </a:p>
           <a:p>
@@ -17067,7 +17067,7 @@
                 <a:latin typeface="Times New Roman"/>
                 <a:ea typeface="宋体"/>
               </a:rPr>
-              <a:t>（2）决策判据： </a:t>
+              <a:t>（2）决策判据：</a:t>
             </a:r>
             <a:r>
               <a:rPr sz="1250" b="0">
@@ -17077,7 +17077,7 @@
                 <a:latin typeface="Times New Roman"/>
                 <a:ea typeface="宋体"/>
               </a:rPr>
-              <a:t>只要增量利润 \Delta \pi = \Delta TR - \Delta TC &gt; 0，该定价方案即为财务可行！</a:t>
+              <a:t>只要增量利润 Δ π = Δ TR - Δ TC &gt; 0，该定价方案即为财务可行！</a:t>
             </a:r>
           </a:p>
           <a:p>
@@ -17097,7 +17097,7 @@
                 <a:latin typeface="Times New Roman"/>
                 <a:ea typeface="宋体"/>
               </a:rPr>
-              <a:t>（3）严禁分摊沉没成本： </a:t>
+              <a:t>（3）严禁分摊沉没成本：</a:t>
             </a:r>
             <a:r>
               <a:rPr sz="1250" b="0">
@@ -17207,7 +17207,7 @@
                 <a:latin typeface="Times New Roman"/>
                 <a:ea typeface="宋体"/>
               </a:rPr>
-              <a:t>  2. 例7-2：外贸追加低价订单决策演算</a:t>
+              <a:t>2. 例7-2：外贸追加低价订单决策演算</a:t>
             </a:r>
           </a:p>
         </p:txBody>
@@ -17250,7 +17250,7 @@
                 <a:latin typeface="Times New Roman"/>
                 <a:ea typeface="宋体"/>
               </a:rPr>
-              <a:t>（1）决策背景： </a:t>
+              <a:t>（1）决策背景：</a:t>
             </a:r>
             <a:r>
               <a:rPr sz="1250" b="0">
@@ -17280,7 +17280,7 @@
                 <a:latin typeface="Times New Roman"/>
                 <a:ea typeface="宋体"/>
               </a:rPr>
-              <a:t>（2）外贸特殊出价： </a:t>
+              <a:t>（2）外贸特殊出价：</a:t>
             </a:r>
             <a:r>
               <a:rPr sz="1250" b="0">
@@ -17310,7 +17310,7 @@
                 <a:latin typeface="Times New Roman"/>
                 <a:ea typeface="宋体"/>
               </a:rPr>
-              <a:t>（3）增量损益测算： </a:t>
+              <a:t>（3）增量损益测算：</a:t>
             </a:r>
             <a:r>
               <a:rPr sz="1250" b="0">
@@ -17320,7 +17320,7 @@
                 <a:latin typeface="Times New Roman"/>
                 <a:ea typeface="宋体"/>
               </a:rPr>
-              <a:t>\Delta TR = 60 \times 2 = 120 万元，\Delta TC = 40 \times 2 = 80 万元 \implies \Delta \pi = +40 万元！</a:t>
+              <a:t>Δ TR = 60 × 2 = 120 万元，Δ TC = 40 × 2 = 80 万元 ⇒ Δ π = +40 万元！</a:t>
             </a:r>
           </a:p>
           <a:p>
@@ -17340,7 +17340,7 @@
                 <a:latin typeface="Times New Roman"/>
                 <a:ea typeface="宋体"/>
               </a:rPr>
-              <a:t>（4）最终决策结论： </a:t>
+              <a:t>（4）最终决策结论：</a:t>
             </a:r>
             <a:r>
               <a:rPr sz="1250" b="0">
@@ -17407,7 +17407,7 @@
                 <a:latin typeface="Times New Roman"/>
                 <a:ea typeface="宋体"/>
               </a:rPr>
-              <a:t>  ★ 核心要点：增量定价打破了'低于平均总成本就拒单'的教条，是产能过剩期盘活闲置资产的利器。</a:t>
+              <a:t>★ 核心要点：增量定价打破了'低于平均总成本就拒单'的教条，是产能过剩期盘活闲置资产的利器。</a:t>
             </a:r>
           </a:p>
         </p:txBody>
@@ -17814,7 +17814,7 @@
                 <a:latin typeface="Times New Roman"/>
                 <a:ea typeface="宋体"/>
               </a:rPr>
-              <a:t>  1. 互补关联产品联动定价决策（例7-4）</a:t>
+              <a:t>1. 互补关联产品联动定价决策（例7-4）</a:t>
             </a:r>
           </a:p>
         </p:txBody>
@@ -17857,7 +17857,7 @@
                 <a:latin typeface="Times New Roman"/>
                 <a:ea typeface="宋体"/>
               </a:rPr>
-              <a:t>（1）跨品类联动决策场景： </a:t>
+              <a:t>（1）跨品类联动决策场景：</a:t>
             </a:r>
             <a:r>
               <a:rPr sz="1250" b="0">
@@ -17887,7 +17887,7 @@
                 <a:latin typeface="Times New Roman"/>
                 <a:ea typeface="宋体"/>
               </a:rPr>
-              <a:t>（2）增量联动利润核算： </a:t>
+              <a:t>（2）增量联动利润核算：</a:t>
             </a:r>
             <a:r>
               <a:rPr sz="1250" b="0">
@@ -17897,7 +17897,7 @@
                 <a:latin typeface="Times New Roman"/>
                 <a:ea typeface="宋体"/>
               </a:rPr>
-              <a:t>\Delta \pi_{\text{总}} = \Delta \pi_{\text{主设备}} + \Delta \pi_{\text{后续耗材配件}}</a:t>
+              <a:t>Δ π_总 = Δ π_主设备 + Δ π_后续耗材配件</a:t>
             </a:r>
           </a:p>
           <a:p>
@@ -17917,7 +17917,7 @@
                 <a:latin typeface="Times New Roman"/>
                 <a:ea typeface="宋体"/>
               </a:rPr>
-              <a:t>（3）管理决策准则： </a:t>
+              <a:t>（3）管理决策准则：</a:t>
             </a:r>
             <a:r>
               <a:rPr sz="1250" b="0">
@@ -17927,7 +17927,7 @@
                 <a:latin typeface="Times New Roman"/>
                 <a:ea typeface="宋体"/>
               </a:rPr>
-              <a:t>即便主设备单品账面微亏，只要能带动高额耗材净利润且总增量 \Delta \pi &gt; 0，依然是高明战略。</a:t>
+              <a:t>即便主设备单品账面微亏，只要能带动高额耗材净利润且总增量 Δ π &gt; 0，依然是高明战略。</a:t>
             </a:r>
           </a:p>
         </p:txBody>
@@ -18027,7 +18027,7 @@
                 <a:latin typeface="Times New Roman"/>
                 <a:ea typeface="宋体"/>
               </a:rPr>
-              <a:t>  2. 案例7-2：日航机票降价与旅游全生态盈利</a:t>
+              <a:t>2. 案例7-2：日航机票降价与旅游全生态盈利</a:t>
             </a:r>
           </a:p>
         </p:txBody>
@@ -18070,7 +18070,7 @@
                 <a:latin typeface="Times New Roman"/>
                 <a:ea typeface="宋体"/>
               </a:rPr>
-              <a:t>（1）商业操作： </a:t>
+              <a:t>（1）商业操作：</a:t>
             </a:r>
             <a:r>
               <a:rPr sz="1250" b="0">
@@ -18100,7 +18100,7 @@
                 <a:latin typeface="Times New Roman"/>
                 <a:ea typeface="宋体"/>
               </a:rPr>
-              <a:t>（2）全生态增量捕获： </a:t>
+              <a:t>（2）全生态增量捕获：</a:t>
             </a:r>
             <a:r>
               <a:rPr sz="1250" b="0">
@@ -18167,7 +18167,7 @@
                 <a:latin typeface="Times New Roman"/>
                 <a:ea typeface="宋体"/>
               </a:rPr>
-              <a:t>  ★ 核心要点：增量定价要求管理者具备生态化全局视野，善于用低门槛引流品撬动高毛利变现品。</a:t>
+              <a:t>★ 核心要点：增量定价要求管理者具备生态化全局视野，善于用低门槛引流品撬动高毛利变现品。</a:t>
             </a:r>
           </a:p>
         </p:txBody>
